--- a/docs/lecture_slides/Week 9/2026/Week9_Lecture21_Slides_10_23_2026.pptx
+++ b/docs/lecture_slides/Week 9/2026/Week9_Lecture21_Slides_10_23_2026.pptx
@@ -277,7 +277,7 @@
           <a:p>
             <a:fld id="{06882561-BD16-4A95-ACA1-5204E478F2FE}" type="datetimeFigureOut">
               <a:rPr lang="en-US" smtClean="0"/>
-              <a:t>10/21/2026</a:t>
+              <a:t>10/23/2026</a:t>
             </a:fld>
             <a:endParaRPr lang="en-US"/>
           </a:p>
@@ -475,7 +475,7 @@
           <a:p>
             <a:fld id="{06882561-BD16-4A95-ACA1-5204E478F2FE}" type="datetimeFigureOut">
               <a:rPr lang="en-US" smtClean="0"/>
-              <a:t>10/21/2026</a:t>
+              <a:t>10/23/2026</a:t>
             </a:fld>
             <a:endParaRPr lang="en-US"/>
           </a:p>
@@ -683,7 +683,7 @@
           <a:p>
             <a:fld id="{06882561-BD16-4A95-ACA1-5204E478F2FE}" type="datetimeFigureOut">
               <a:rPr lang="en-US" smtClean="0"/>
-              <a:t>10/21/2026</a:t>
+              <a:t>10/23/2026</a:t>
             </a:fld>
             <a:endParaRPr lang="en-US"/>
           </a:p>
@@ -881,7 +881,7 @@
           <a:p>
             <a:fld id="{06882561-BD16-4A95-ACA1-5204E478F2FE}" type="datetimeFigureOut">
               <a:rPr lang="en-US" smtClean="0"/>
-              <a:t>10/21/2026</a:t>
+              <a:t>10/23/2026</a:t>
             </a:fld>
             <a:endParaRPr lang="en-US"/>
           </a:p>
@@ -1156,7 +1156,7 @@
           <a:p>
             <a:fld id="{06882561-BD16-4A95-ACA1-5204E478F2FE}" type="datetimeFigureOut">
               <a:rPr lang="en-US" smtClean="0"/>
-              <a:t>10/21/2026</a:t>
+              <a:t>10/23/2026</a:t>
             </a:fld>
             <a:endParaRPr lang="en-US"/>
           </a:p>
@@ -1421,7 +1421,7 @@
           <a:p>
             <a:fld id="{06882561-BD16-4A95-ACA1-5204E478F2FE}" type="datetimeFigureOut">
               <a:rPr lang="en-US" smtClean="0"/>
-              <a:t>10/21/2026</a:t>
+              <a:t>10/23/2026</a:t>
             </a:fld>
             <a:endParaRPr lang="en-US"/>
           </a:p>
@@ -1833,7 +1833,7 @@
           <a:p>
             <a:fld id="{06882561-BD16-4A95-ACA1-5204E478F2FE}" type="datetimeFigureOut">
               <a:rPr lang="en-US" smtClean="0"/>
-              <a:t>10/21/2026</a:t>
+              <a:t>10/23/2026</a:t>
             </a:fld>
             <a:endParaRPr lang="en-US"/>
           </a:p>
@@ -1974,7 +1974,7 @@
           <a:p>
             <a:fld id="{06882561-BD16-4A95-ACA1-5204E478F2FE}" type="datetimeFigureOut">
               <a:rPr lang="en-US" smtClean="0"/>
-              <a:t>10/21/2026</a:t>
+              <a:t>10/23/2026</a:t>
             </a:fld>
             <a:endParaRPr lang="en-US"/>
           </a:p>
@@ -2087,7 +2087,7 @@
           <a:p>
             <a:fld id="{06882561-BD16-4A95-ACA1-5204E478F2FE}" type="datetimeFigureOut">
               <a:rPr lang="en-US" smtClean="0"/>
-              <a:t>10/21/2026</a:t>
+              <a:t>10/23/2026</a:t>
             </a:fld>
             <a:endParaRPr lang="en-US"/>
           </a:p>
@@ -2398,7 +2398,7 @@
           <a:p>
             <a:fld id="{06882561-BD16-4A95-ACA1-5204E478F2FE}" type="datetimeFigureOut">
               <a:rPr lang="en-US" smtClean="0"/>
-              <a:t>10/21/2026</a:t>
+              <a:t>10/23/2026</a:t>
             </a:fld>
             <a:endParaRPr lang="en-US"/>
           </a:p>
@@ -2686,7 +2686,7 @@
           <a:p>
             <a:fld id="{06882561-BD16-4A95-ACA1-5204E478F2FE}" type="datetimeFigureOut">
               <a:rPr lang="en-US" smtClean="0"/>
-              <a:t>10/21/2026</a:t>
+              <a:t>10/23/2026</a:t>
             </a:fld>
             <a:endParaRPr lang="en-US"/>
           </a:p>
@@ -2927,7 +2927,7 @@
           <a:p>
             <a:fld id="{06882561-BD16-4A95-ACA1-5204E478F2FE}" type="datetimeFigureOut">
               <a:rPr lang="en-US" smtClean="0"/>
-              <a:t>10/21/2026</a:t>
+              <a:t>10/23/2026</a:t>
             </a:fld>
             <a:endParaRPr lang="en-US"/>
           </a:p>
